--- a/plugins-dist/ppt-engine/raven_ppt/assets/templates/gold_panel_year_end_summary.pptx
+++ b/plugins-dist/ppt-engine/raven_ppt/assets/templates/gold_panel_year_end_summary.pptx
@@ -6334,10 +6334,6 @@
           </a:lstStyle>
           <a:p>
             <a:pPr lvl="0"/>
-            <a:r>
-              <a:rPr lang="en-US" dirty="0"/>
-              <a:t>www.islide.cc</a:t>
-            </a:r>
           </a:p>
         </p:txBody>
       </p:sp>
@@ -10648,10 +10644,6 @@
           </a:lstStyle>
           <a:p>
             <a:pPr lvl="0"/>
-            <a:r>
-              <a:rPr lang="en-US" dirty="0"/>
-              <a:t>www.islide.cc</a:t>
-            </a:r>
           </a:p>
         </p:txBody>
       </p:sp>
@@ -11591,7 +11583,7 @@
             <a:pPr lvl="0"/>
             <a:r>
               <a:rPr lang="en-US" dirty="0"/>
-              <a:t>www.islide.cc</a:t>
+              <a:t>20XX.XX.XX</a:t>
             </a:r>
           </a:p>
         </p:txBody>
@@ -40701,7 +40693,7 @@
           <a:p>
             <a:r>
               <a:rPr lang="en-US" altLang="zh-CN" dirty="0"/>
-              <a:t>www.islide.cc</a:t>
+              <a:t>20XX.XX.XX</a:t>
             </a:r>
           </a:p>
         </p:txBody>
@@ -46759,15 +46751,13 @@
 </file>
 
 <file path=ppt/tags/tag1.xml><?xml version="1.0" encoding="utf-8"?>
-<p:tagLst xmlns:a="http://schemas.openxmlformats.org/drawingml/2006/main" xmlns:r="http://schemas.openxmlformats.org/officeDocument/2006/relationships" xmlns:p="http://schemas.openxmlformats.org/presentationml/2006/main">
-  <p:tag name="ISLIDE.GUIDESSETTING" val="{&quot;Id&quot;:&quot;GuidesStyle_Normal&quot;,&quot;Name&quot;:&quot;GuidesStyle_Normal&quot;,&quot;Kind&quot;:0,&quot;OldGuidesSetting&quot;:{&quot;HeaderHeight&quot;:15.0,&quot;FooterHeight&quot;:9.0,&quot;SideMargin&quot;:5.5,&quot;TopMargin&quot;:0.0,&quot;BottomMargin&quot;:0.0,&quot;IntervalMargin&quot;:1.5}}"/>
-</p:tagLst>
+<p:tagLst xmlns:a="http://schemas.openxmlformats.org/drawingml/2006/main" xmlns:r="http://schemas.openxmlformats.org/officeDocument/2006/relationships" xmlns:p="http://schemas.openxmlformats.org/presentationml/2006/main"/>
 </file>
 
 <file path=ppt/theme/theme1.xml><?xml version="1.0" encoding="utf-8"?>
-<a:theme xmlns:a="http://schemas.openxmlformats.org/drawingml/2006/main" name="Designed by iSlide">
+<a:theme xmlns:a="http://schemas.openxmlformats.org/drawingml/2006/main" name="Raven">
   <a:themeElements>
-    <a:clrScheme name="iSlide">
+    <a:clrScheme name="Raven">
       <a:dk1>
         <a:srgbClr val="2F2F2F"/>
       </a:dk1>
@@ -46805,7 +46795,7 @@
         <a:srgbClr val="979797"/>
       </a:folHlink>
     </a:clrScheme>
-    <a:fontScheme name="iSlide">
+    <a:fontScheme name="Raven">
       <a:majorFont>
         <a:latin typeface="Arial"/>
         <a:ea typeface="微软雅黑"/>
@@ -46817,7 +46807,7 @@
         <a:cs typeface=""/>
       </a:minorFont>
     </a:fontScheme>
-    <a:fmtScheme name="iSlide">
+    <a:fmtScheme name="Raven">
       <a:fillStyleLst>
         <a:solidFill>
           <a:schemeClr val="phClr"/>
@@ -46959,7 +46949,7 @@
   <a:extraClrSchemeLst/>
   <a:extLst>
     <a:ext uri="{05A4C25C-085E-4340-85A3-A5531E510DB2}">
-      <thm15:themeFamily xmlns:thm15="http://schemas.microsoft.com/office/thememl/2012/main" name="iSlide" id="{62F939B6-93AF-4DB8-9C6B-D6C7DFDC589F}" vid="{4A3C46E8-61CC-4603-A589-7422A47A8E4A}"/>
+      <thm15:themeFamily xmlns:thm15="http://schemas.microsoft.com/office/thememl/2012/main" name="Raven" id="{62F939B6-93AF-4DB8-9C6B-D6C7DFDC589F}" vid="{4A3C46E8-61CC-4603-A589-7422A47A8E4A}"/>
     </a:ext>
   </a:extLst>
 </a:theme>
